--- a/docs/ui_design.pptx
+++ b/docs/ui_design.pptx
@@ -9,6 +9,7 @@
     <p:sldId id="257" r:id="rId3"/>
     <p:sldId id="258" r:id="rId4"/>
     <p:sldId id="259" r:id="rId5"/>
+    <p:sldId id="260" r:id="rId6"/>
   </p:sldIdLst>
   <p:sldSz cx="12192000" cy="6858000"/>
   <p:notesSz cx="6858000" cy="9144000"/>
@@ -4551,6 +4552,141 @@
 </p:sld>
 </file>
 
+<file path=ppt/slides/slide5.xml><?xml version="1.0" encoding="utf-8"?>
+<p:sld xmlns:a="http://schemas.openxmlformats.org/drawingml/2006/main" xmlns:r="http://schemas.openxmlformats.org/officeDocument/2006/relationships" xmlns:p="http://schemas.openxmlformats.org/presentationml/2006/main">
+  <p:cSld>
+    <p:spTree>
+      <p:nvGrpSpPr>
+        <p:cNvPr id="1" name=""/>
+        <p:cNvGrpSpPr/>
+        <p:nvPr/>
+      </p:nvGrpSpPr>
+      <p:grpSpPr>
+        <a:xfrm>
+          <a:off x="0" y="0"/>
+          <a:ext cx="0" cy="0"/>
+          <a:chOff x="0" y="0"/>
+          <a:chExt cx="0" cy="0"/>
+        </a:xfrm>
+      </p:grpSpPr>
+      <p:pic>
+        <p:nvPicPr>
+          <p:cNvPr id="3" name="Picture 2">
+            <a:extLst>
+              <a:ext uri="{FF2B5EF4-FFF2-40B4-BE49-F238E27FC236}">
+                <a16:creationId xmlns:a16="http://schemas.microsoft.com/office/drawing/2014/main" id="{67F97604-D0EF-5258-8159-11C751AB54E6}"/>
+              </a:ext>
+            </a:extLst>
+          </p:cNvPr>
+          <p:cNvPicPr>
+            <a:picLocks noChangeAspect="1"/>
+          </p:cNvPicPr>
+          <p:nvPr/>
+        </p:nvPicPr>
+        <p:blipFill>
+          <a:blip r:embed="rId2"/>
+          <a:srcRect r="35846"/>
+          <a:stretch>
+            <a:fillRect/>
+          </a:stretch>
+        </p:blipFill>
+        <p:spPr>
+          <a:xfrm>
+            <a:off x="3594846" y="368180"/>
+            <a:ext cx="7821706" cy="6121640"/>
+          </a:xfrm>
+          <a:prstGeom prst="rect">
+            <a:avLst/>
+          </a:prstGeom>
+        </p:spPr>
+      </p:pic>
+      <p:pic>
+        <p:nvPicPr>
+          <p:cNvPr id="5" name="Picture 4">
+            <a:extLst>
+              <a:ext uri="{FF2B5EF4-FFF2-40B4-BE49-F238E27FC236}">
+                <a16:creationId xmlns:a16="http://schemas.microsoft.com/office/drawing/2014/main" id="{D79399CB-5D9D-B494-1B8D-714318D91D6B}"/>
+              </a:ext>
+            </a:extLst>
+          </p:cNvPr>
+          <p:cNvPicPr>
+            <a:picLocks noChangeAspect="1"/>
+          </p:cNvPicPr>
+          <p:nvPr/>
+        </p:nvPicPr>
+        <p:blipFill>
+          <a:blip r:embed="rId3">
+            <a:extLst>
+              <a:ext uri="{28A0092B-C50C-407E-A947-70E740481C1C}">
+                <a14:useLocalDpi xmlns:a14="http://schemas.microsoft.com/office/drawing/2010/main" val="0"/>
+              </a:ext>
+            </a:extLst>
+          </a:blip>
+          <a:srcRect l="35368" r="35955"/>
+          <a:stretch>
+            <a:fillRect/>
+          </a:stretch>
+        </p:blipFill>
+        <p:spPr>
+          <a:xfrm>
+            <a:off x="430303" y="368180"/>
+            <a:ext cx="3496235" cy="6076890"/>
+          </a:xfrm>
+          <a:prstGeom prst="rect">
+            <a:avLst/>
+          </a:prstGeom>
+        </p:spPr>
+      </p:pic>
+      <p:pic>
+        <p:nvPicPr>
+          <p:cNvPr id="7" name="Picture 6">
+            <a:extLst>
+              <a:ext uri="{FF2B5EF4-FFF2-40B4-BE49-F238E27FC236}">
+                <a16:creationId xmlns:a16="http://schemas.microsoft.com/office/drawing/2014/main" id="{71A16536-9070-67A1-3391-DF59A96F9D1F}"/>
+              </a:ext>
+            </a:extLst>
+          </p:cNvPr>
+          <p:cNvPicPr>
+            <a:picLocks noChangeAspect="1"/>
+          </p:cNvPicPr>
+          <p:nvPr/>
+        </p:nvPicPr>
+        <p:blipFill>
+          <a:blip r:embed="rId4">
+            <a:extLst>
+              <a:ext uri="{28A0092B-C50C-407E-A947-70E740481C1C}">
+                <a14:useLocalDpi xmlns:a14="http://schemas.microsoft.com/office/drawing/2010/main" val="0"/>
+              </a:ext>
+            </a:extLst>
+          </a:blip>
+          <a:srcRect l="35551" r="35772"/>
+          <a:stretch>
+            <a:fillRect/>
+          </a:stretch>
+        </p:blipFill>
+        <p:spPr>
+          <a:xfrm>
+            <a:off x="4123759" y="368180"/>
+            <a:ext cx="3496236" cy="6061020"/>
+          </a:xfrm>
+          <a:prstGeom prst="rect">
+            <a:avLst/>
+          </a:prstGeom>
+        </p:spPr>
+      </p:pic>
+    </p:spTree>
+    <p:extLst>
+      <p:ext uri="{BB962C8B-B14F-4D97-AF65-F5344CB8AC3E}">
+        <p14:creationId xmlns:p14="http://schemas.microsoft.com/office/powerpoint/2010/main" val="469835844"/>
+      </p:ext>
+    </p:extLst>
+  </p:cSld>
+  <p:clrMapOvr>
+    <a:masterClrMapping/>
+  </p:clrMapOvr>
+</p:sld>
+</file>
+
 <file path=ppt/theme/theme1.xml><?xml version="1.0" encoding="utf-8"?>
 <a:theme xmlns:a="http://schemas.openxmlformats.org/drawingml/2006/main" name="Office Theme">
   <a:themeElements>

--- a/docs/ui_design.pptx
+++ b/docs/ui_design.pptx
@@ -10,6 +10,8 @@
     <p:sldId id="258" r:id="rId4"/>
     <p:sldId id="259" r:id="rId5"/>
     <p:sldId id="260" r:id="rId6"/>
+    <p:sldId id="262" r:id="rId7"/>
+    <p:sldId id="261" r:id="rId8"/>
   </p:sldIdLst>
   <p:sldSz cx="12192000" cy="6858000"/>
   <p:notesSz cx="6858000" cy="9144000"/>
@@ -263,7 +265,7 @@
           <a:p>
             <a:fld id="{07C8A8AF-A63C-4D16-8AB8-E7097E375183}" type="datetimeFigureOut">
               <a:rPr lang="en-US" smtClean="0"/>
-              <a:t>3/21/2026</a:t>
+              <a:t>3/23/2026</a:t>
             </a:fld>
             <a:endParaRPr lang="en-US"/>
           </a:p>
@@ -461,7 +463,7 @@
           <a:p>
             <a:fld id="{07C8A8AF-A63C-4D16-8AB8-E7097E375183}" type="datetimeFigureOut">
               <a:rPr lang="en-US" smtClean="0"/>
-              <a:t>3/21/2026</a:t>
+              <a:t>3/23/2026</a:t>
             </a:fld>
             <a:endParaRPr lang="en-US"/>
           </a:p>
@@ -669,7 +671,7 @@
           <a:p>
             <a:fld id="{07C8A8AF-A63C-4D16-8AB8-E7097E375183}" type="datetimeFigureOut">
               <a:rPr lang="en-US" smtClean="0"/>
-              <a:t>3/21/2026</a:t>
+              <a:t>3/23/2026</a:t>
             </a:fld>
             <a:endParaRPr lang="en-US"/>
           </a:p>
@@ -867,7 +869,7 @@
           <a:p>
             <a:fld id="{07C8A8AF-A63C-4D16-8AB8-E7097E375183}" type="datetimeFigureOut">
               <a:rPr lang="en-US" smtClean="0"/>
-              <a:t>3/21/2026</a:t>
+              <a:t>3/23/2026</a:t>
             </a:fld>
             <a:endParaRPr lang="en-US"/>
           </a:p>
@@ -1142,7 +1144,7 @@
           <a:p>
             <a:fld id="{07C8A8AF-A63C-4D16-8AB8-E7097E375183}" type="datetimeFigureOut">
               <a:rPr lang="en-US" smtClean="0"/>
-              <a:t>3/21/2026</a:t>
+              <a:t>3/23/2026</a:t>
             </a:fld>
             <a:endParaRPr lang="en-US"/>
           </a:p>
@@ -1407,7 +1409,7 @@
           <a:p>
             <a:fld id="{07C8A8AF-A63C-4D16-8AB8-E7097E375183}" type="datetimeFigureOut">
               <a:rPr lang="en-US" smtClean="0"/>
-              <a:t>3/21/2026</a:t>
+              <a:t>3/23/2026</a:t>
             </a:fld>
             <a:endParaRPr lang="en-US"/>
           </a:p>
@@ -1819,7 +1821,7 @@
           <a:p>
             <a:fld id="{07C8A8AF-A63C-4D16-8AB8-E7097E375183}" type="datetimeFigureOut">
               <a:rPr lang="en-US" smtClean="0"/>
-              <a:t>3/21/2026</a:t>
+              <a:t>3/23/2026</a:t>
             </a:fld>
             <a:endParaRPr lang="en-US"/>
           </a:p>
@@ -1960,7 +1962,7 @@
           <a:p>
             <a:fld id="{07C8A8AF-A63C-4D16-8AB8-E7097E375183}" type="datetimeFigureOut">
               <a:rPr lang="en-US" smtClean="0"/>
-              <a:t>3/21/2026</a:t>
+              <a:t>3/23/2026</a:t>
             </a:fld>
             <a:endParaRPr lang="en-US"/>
           </a:p>
@@ -2073,7 +2075,7 @@
           <a:p>
             <a:fld id="{07C8A8AF-A63C-4D16-8AB8-E7097E375183}" type="datetimeFigureOut">
               <a:rPr lang="en-US" smtClean="0"/>
-              <a:t>3/21/2026</a:t>
+              <a:t>3/23/2026</a:t>
             </a:fld>
             <a:endParaRPr lang="en-US"/>
           </a:p>
@@ -2384,7 +2386,7 @@
           <a:p>
             <a:fld id="{07C8A8AF-A63C-4D16-8AB8-E7097E375183}" type="datetimeFigureOut">
               <a:rPr lang="en-US" smtClean="0"/>
-              <a:t>3/21/2026</a:t>
+              <a:t>3/23/2026</a:t>
             </a:fld>
             <a:endParaRPr lang="en-US"/>
           </a:p>
@@ -2672,7 +2674,7 @@
           <a:p>
             <a:fld id="{07C8A8AF-A63C-4D16-8AB8-E7097E375183}" type="datetimeFigureOut">
               <a:rPr lang="en-US" smtClean="0"/>
-              <a:t>3/21/2026</a:t>
+              <a:t>3/23/2026</a:t>
             </a:fld>
             <a:endParaRPr lang="en-US"/>
           </a:p>
@@ -2913,7 +2915,7 @@
           <a:p>
             <a:fld id="{07C8A8AF-A63C-4D16-8AB8-E7097E375183}" type="datetimeFigureOut">
               <a:rPr lang="en-US" smtClean="0"/>
-              <a:t>3/21/2026</a:t>
+              <a:t>3/23/2026</a:t>
             </a:fld>
             <a:endParaRPr lang="en-US"/>
           </a:p>
@@ -4569,6 +4571,58 @@
           <a:chExt cx="0" cy="0"/>
         </a:xfrm>
       </p:grpSpPr>
+      <p:sp>
+        <p:nvSpPr>
+          <p:cNvPr id="2" name="Rectangle 1">
+            <a:extLst>
+              <a:ext uri="{FF2B5EF4-FFF2-40B4-BE49-F238E27FC236}">
+                <a16:creationId xmlns:a16="http://schemas.microsoft.com/office/drawing/2014/main" id="{0FADCE39-3BDD-73A1-9227-80C7BF410C1E}"/>
+              </a:ext>
+            </a:extLst>
+          </p:cNvPr>
+          <p:cNvSpPr/>
+          <p:nvPr/>
+        </p:nvSpPr>
+        <p:spPr>
+          <a:xfrm>
+            <a:off x="0" y="0"/>
+            <a:ext cx="12192000" cy="6858000"/>
+          </a:xfrm>
+          <a:prstGeom prst="rect">
+            <a:avLst/>
+          </a:prstGeom>
+          <a:solidFill>
+            <a:srgbClr val="FEF5E5"/>
+          </a:solidFill>
+          <a:ln>
+            <a:noFill/>
+          </a:ln>
+        </p:spPr>
+        <p:style>
+          <a:lnRef idx="2">
+            <a:schemeClr val="accent1">
+              <a:shade val="15000"/>
+            </a:schemeClr>
+          </a:lnRef>
+          <a:fillRef idx="1">
+            <a:schemeClr val="accent1"/>
+          </a:fillRef>
+          <a:effectRef idx="0">
+            <a:schemeClr val="accent1"/>
+          </a:effectRef>
+          <a:fontRef idx="minor">
+            <a:schemeClr val="lt1"/>
+          </a:fontRef>
+        </p:style>
+        <p:txBody>
+          <a:bodyPr rtlCol="0" anchor="ctr"/>
+          <a:lstStyle/>
+          <a:p>
+            <a:pPr algn="ctr"/>
+            <a:endParaRPr lang="en-US"/>
+          </a:p>
+        </p:txBody>
+      </p:sp>
       <p:pic>
         <p:nvPicPr>
           <p:cNvPr id="3" name="Picture 2">
@@ -4585,27 +4639,540 @@
         </p:nvPicPr>
         <p:blipFill>
           <a:blip r:embed="rId2"/>
-          <a:srcRect r="35846"/>
+          <a:srcRect l="35897" r="35846"/>
           <a:stretch>
             <a:fillRect/>
           </a:stretch>
         </p:blipFill>
         <p:spPr>
           <a:xfrm>
-            <a:off x="3594846" y="368180"/>
-            <a:ext cx="7821706" cy="6121640"/>
+            <a:off x="8246533" y="94419"/>
+            <a:ext cx="3741867" cy="6648805"/>
           </a:xfrm>
           <a:prstGeom prst="rect">
             <a:avLst/>
           </a:prstGeom>
+          <a:ln>
+            <a:solidFill>
+              <a:schemeClr val="tx1"/>
+            </a:solidFill>
+          </a:ln>
         </p:spPr>
       </p:pic>
+      <p:grpSp>
+        <p:nvGrpSpPr>
+          <p:cNvPr id="22" name="Group 21">
+            <a:extLst>
+              <a:ext uri="{FF2B5EF4-FFF2-40B4-BE49-F238E27FC236}">
+                <a16:creationId xmlns:a16="http://schemas.microsoft.com/office/drawing/2014/main" id="{E74CF7AD-A877-1AF5-AE50-BBD77DCAEF79}"/>
+              </a:ext>
+            </a:extLst>
+          </p:cNvPr>
+          <p:cNvGrpSpPr/>
+          <p:nvPr/>
+        </p:nvGrpSpPr>
+        <p:grpSpPr>
+          <a:xfrm>
+            <a:off x="94190" y="93132"/>
+            <a:ext cx="5959477" cy="6650092"/>
+            <a:chOff x="658780" y="233953"/>
+            <a:chExt cx="7816950" cy="8722818"/>
+          </a:xfrm>
+        </p:grpSpPr>
+        <p:grpSp>
+          <p:nvGrpSpPr>
+            <p:cNvPr id="9" name="Group 8">
+              <a:extLst>
+                <a:ext uri="{FF2B5EF4-FFF2-40B4-BE49-F238E27FC236}">
+                  <a16:creationId xmlns:a16="http://schemas.microsoft.com/office/drawing/2014/main" id="{2D2964F1-2C3A-28CF-2FF4-3FEB06D7ABF1}"/>
+                </a:ext>
+              </a:extLst>
+            </p:cNvPr>
+            <p:cNvGrpSpPr/>
+            <p:nvPr/>
+          </p:nvGrpSpPr>
+          <p:grpSpPr>
+            <a:xfrm rot="2700000">
+              <a:off x="4841541" y="5116763"/>
+              <a:ext cx="297809" cy="69047"/>
+              <a:chOff x="5482206" y="2789337"/>
+              <a:chExt cx="506567" cy="117447"/>
+            </a:xfrm>
+          </p:grpSpPr>
+          <p:sp>
+            <p:nvSpPr>
+              <p:cNvPr id="4" name="Oval 3">
+                <a:extLst>
+                  <a:ext uri="{FF2B5EF4-FFF2-40B4-BE49-F238E27FC236}">
+                    <a16:creationId xmlns:a16="http://schemas.microsoft.com/office/drawing/2014/main" id="{E29D0703-42BD-2899-CF9D-FC5777EFB622}"/>
+                  </a:ext>
+                </a:extLst>
+              </p:cNvPr>
+              <p:cNvSpPr/>
+              <p:nvPr/>
+            </p:nvSpPr>
+            <p:spPr>
+              <a:xfrm>
+                <a:off x="5482206" y="2789339"/>
+                <a:ext cx="117445" cy="117445"/>
+              </a:xfrm>
+              <a:prstGeom prst="ellipse">
+                <a:avLst/>
+              </a:prstGeom>
+              <a:solidFill>
+                <a:srgbClr val="462D00"/>
+              </a:solidFill>
+              <a:ln>
+                <a:noFill/>
+              </a:ln>
+            </p:spPr>
+            <p:style>
+              <a:lnRef idx="2">
+                <a:schemeClr val="accent1">
+                  <a:shade val="15000"/>
+                </a:schemeClr>
+              </a:lnRef>
+              <a:fillRef idx="1">
+                <a:schemeClr val="accent1"/>
+              </a:fillRef>
+              <a:effectRef idx="0">
+                <a:schemeClr val="accent1"/>
+              </a:effectRef>
+              <a:fontRef idx="minor">
+                <a:schemeClr val="lt1"/>
+              </a:fontRef>
+            </p:style>
+            <p:txBody>
+              <a:bodyPr rtlCol="0" anchor="ctr"/>
+              <a:lstStyle/>
+              <a:p>
+                <a:pPr algn="ctr"/>
+                <a:endParaRPr lang="en-US"/>
+              </a:p>
+            </p:txBody>
+          </p:sp>
+          <p:sp>
+            <p:nvSpPr>
+              <p:cNvPr id="6" name="Oval 5">
+                <a:extLst>
+                  <a:ext uri="{FF2B5EF4-FFF2-40B4-BE49-F238E27FC236}">
+                    <a16:creationId xmlns:a16="http://schemas.microsoft.com/office/drawing/2014/main" id="{75DB92EE-87B9-EFC9-4458-65FEA44BB34D}"/>
+                  </a:ext>
+                </a:extLst>
+              </p:cNvPr>
+              <p:cNvSpPr/>
+              <p:nvPr/>
+            </p:nvSpPr>
+            <p:spPr>
+              <a:xfrm>
+                <a:off x="5676767" y="2789337"/>
+                <a:ext cx="117445" cy="117445"/>
+              </a:xfrm>
+              <a:prstGeom prst="ellipse">
+                <a:avLst/>
+              </a:prstGeom>
+              <a:solidFill>
+                <a:srgbClr val="462D00"/>
+              </a:solidFill>
+              <a:ln>
+                <a:noFill/>
+              </a:ln>
+            </p:spPr>
+            <p:style>
+              <a:lnRef idx="2">
+                <a:schemeClr val="accent1">
+                  <a:shade val="15000"/>
+                </a:schemeClr>
+              </a:lnRef>
+              <a:fillRef idx="1">
+                <a:schemeClr val="accent1"/>
+              </a:fillRef>
+              <a:effectRef idx="0">
+                <a:schemeClr val="accent1"/>
+              </a:effectRef>
+              <a:fontRef idx="minor">
+                <a:schemeClr val="lt1"/>
+              </a:fontRef>
+            </p:style>
+            <p:txBody>
+              <a:bodyPr rtlCol="0" anchor="ctr"/>
+              <a:lstStyle/>
+              <a:p>
+                <a:pPr algn="ctr"/>
+                <a:endParaRPr lang="en-US"/>
+              </a:p>
+            </p:txBody>
+          </p:sp>
+          <p:sp>
+            <p:nvSpPr>
+              <p:cNvPr id="8" name="Oval 7">
+                <a:extLst>
+                  <a:ext uri="{FF2B5EF4-FFF2-40B4-BE49-F238E27FC236}">
+                    <a16:creationId xmlns:a16="http://schemas.microsoft.com/office/drawing/2014/main" id="{5B0F178E-7FF3-54D6-153B-5CF93C0425C4}"/>
+                  </a:ext>
+                </a:extLst>
+              </p:cNvPr>
+              <p:cNvSpPr/>
+              <p:nvPr/>
+            </p:nvSpPr>
+            <p:spPr>
+              <a:xfrm>
+                <a:off x="5871328" y="2789338"/>
+                <a:ext cx="117445" cy="117445"/>
+              </a:xfrm>
+              <a:prstGeom prst="ellipse">
+                <a:avLst/>
+              </a:prstGeom>
+              <a:solidFill>
+                <a:srgbClr val="462D00"/>
+              </a:solidFill>
+              <a:ln>
+                <a:noFill/>
+              </a:ln>
+            </p:spPr>
+            <p:style>
+              <a:lnRef idx="2">
+                <a:schemeClr val="accent1">
+                  <a:shade val="15000"/>
+                </a:schemeClr>
+              </a:lnRef>
+              <a:fillRef idx="1">
+                <a:schemeClr val="accent1"/>
+              </a:fillRef>
+              <a:effectRef idx="0">
+                <a:schemeClr val="accent1"/>
+              </a:effectRef>
+              <a:fontRef idx="minor">
+                <a:schemeClr val="lt1"/>
+              </a:fontRef>
+            </p:style>
+            <p:txBody>
+              <a:bodyPr rtlCol="0" anchor="ctr"/>
+              <a:lstStyle/>
+              <a:p>
+                <a:pPr algn="ctr"/>
+                <a:endParaRPr lang="en-US"/>
+              </a:p>
+            </p:txBody>
+          </p:sp>
+        </p:grpSp>
+        <p:grpSp>
+          <p:nvGrpSpPr>
+            <p:cNvPr id="18" name="Group 17">
+              <a:extLst>
+                <a:ext uri="{FF2B5EF4-FFF2-40B4-BE49-F238E27FC236}">
+                  <a16:creationId xmlns:a16="http://schemas.microsoft.com/office/drawing/2014/main" id="{36FE71B2-8CB0-BD1C-6384-D8F6946212C7}"/>
+                </a:ext>
+              </a:extLst>
+            </p:cNvPr>
+            <p:cNvGrpSpPr/>
+            <p:nvPr/>
+          </p:nvGrpSpPr>
+          <p:grpSpPr>
+            <a:xfrm>
+              <a:off x="658780" y="233953"/>
+              <a:ext cx="3306403" cy="3568295"/>
+              <a:chOff x="658780" y="233953"/>
+              <a:chExt cx="3306403" cy="3568295"/>
+            </a:xfrm>
+          </p:grpSpPr>
+          <p:pic>
+            <p:nvPicPr>
+              <p:cNvPr id="19" name="Picture 18">
+                <a:extLst>
+                  <a:ext uri="{FF2B5EF4-FFF2-40B4-BE49-F238E27FC236}">
+                    <a16:creationId xmlns:a16="http://schemas.microsoft.com/office/drawing/2014/main" id="{F7814D3B-5AA0-D954-1396-CFB25A862FD3}"/>
+                  </a:ext>
+                </a:extLst>
+              </p:cNvPr>
+              <p:cNvPicPr>
+                <a:picLocks noChangeAspect="1"/>
+              </p:cNvPicPr>
+              <p:nvPr/>
+            </p:nvPicPr>
+            <p:blipFill>
+              <a:blip r:embed="rId3"/>
+              <a:srcRect l="23787" r="23357"/>
+              <a:stretch>
+                <a:fillRect/>
+              </a:stretch>
+            </p:blipFill>
+            <p:spPr>
+              <a:xfrm>
+                <a:off x="658782" y="233953"/>
+                <a:ext cx="3306401" cy="3568295"/>
+              </a:xfrm>
+              <a:prstGeom prst="rect">
+                <a:avLst/>
+              </a:prstGeom>
+              <a:ln>
+                <a:solidFill>
+                  <a:schemeClr val="tx1"/>
+                </a:solidFill>
+              </a:ln>
+            </p:spPr>
+          </p:pic>
+          <p:pic>
+            <p:nvPicPr>
+              <p:cNvPr id="20" name="Picture 19">
+                <a:extLst>
+                  <a:ext uri="{FF2B5EF4-FFF2-40B4-BE49-F238E27FC236}">
+                    <a16:creationId xmlns:a16="http://schemas.microsoft.com/office/drawing/2014/main" id="{C85412CD-C696-BDAE-9285-B10D7A887BB2}"/>
+                  </a:ext>
+                </a:extLst>
+              </p:cNvPr>
+              <p:cNvPicPr>
+                <a:picLocks noChangeAspect="1"/>
+              </p:cNvPicPr>
+              <p:nvPr/>
+            </p:nvPicPr>
+            <p:blipFill>
+              <a:blip r:embed="rId4">
+                <a:extLst>
+                  <a:ext uri="{28A0092B-C50C-407E-A947-70E740481C1C}">
+                    <a14:useLocalDpi xmlns:a14="http://schemas.microsoft.com/office/drawing/2010/main" val="0"/>
+                  </a:ext>
+                </a:extLst>
+              </a:blip>
+              <a:srcRect l="36353" t="35319" r="36599" b="41971"/>
+              <a:stretch>
+                <a:fillRect/>
+              </a:stretch>
+            </p:blipFill>
+            <p:spPr>
+              <a:xfrm>
+                <a:off x="658781" y="785283"/>
+                <a:ext cx="3297767" cy="1380067"/>
+              </a:xfrm>
+              <a:prstGeom prst="rect">
+                <a:avLst/>
+              </a:prstGeom>
+              <a:ln>
+                <a:noFill/>
+              </a:ln>
+            </p:spPr>
+          </p:pic>
+          <p:pic>
+            <p:nvPicPr>
+              <p:cNvPr id="21" name="Picture 20">
+                <a:extLst>
+                  <a:ext uri="{FF2B5EF4-FFF2-40B4-BE49-F238E27FC236}">
+                    <a16:creationId xmlns:a16="http://schemas.microsoft.com/office/drawing/2014/main" id="{DA747220-A18D-E787-DF12-3DFC998E1EA7}"/>
+                  </a:ext>
+                </a:extLst>
+              </p:cNvPr>
+              <p:cNvPicPr>
+                <a:picLocks noChangeAspect="1"/>
+              </p:cNvPicPr>
+              <p:nvPr/>
+            </p:nvPicPr>
+            <p:blipFill>
+              <a:blip r:embed="rId4">
+                <a:extLst>
+                  <a:ext uri="{28A0092B-C50C-407E-A947-70E740481C1C}">
+                    <a14:useLocalDpi xmlns:a14="http://schemas.microsoft.com/office/drawing/2010/main" val="0"/>
+                  </a:ext>
+                </a:extLst>
+              </a:blip>
+              <a:srcRect l="36353" t="79258" r="36599"/>
+              <a:stretch>
+                <a:fillRect/>
+              </a:stretch>
+            </p:blipFill>
+            <p:spPr>
+              <a:xfrm>
+                <a:off x="658780" y="2541771"/>
+                <a:ext cx="3297767" cy="1260477"/>
+              </a:xfrm>
+              <a:prstGeom prst="rect">
+                <a:avLst/>
+              </a:prstGeom>
+              <a:ln>
+                <a:noFill/>
+              </a:ln>
+            </p:spPr>
+          </p:pic>
+        </p:grpSp>
+        <p:grpSp>
+          <p:nvGrpSpPr>
+            <p:cNvPr id="14" name="Group 13">
+              <a:extLst>
+                <a:ext uri="{FF2B5EF4-FFF2-40B4-BE49-F238E27FC236}">
+                  <a16:creationId xmlns:a16="http://schemas.microsoft.com/office/drawing/2014/main" id="{3F45DBBF-F144-3F87-5ADB-0F0110EABB75}"/>
+                </a:ext>
+              </a:extLst>
+            </p:cNvPr>
+            <p:cNvGrpSpPr/>
+            <p:nvPr/>
+          </p:nvGrpSpPr>
+          <p:grpSpPr>
+            <a:xfrm>
+              <a:off x="1419397" y="1269443"/>
+              <a:ext cx="3306402" cy="3568295"/>
+              <a:chOff x="4832848" y="233955"/>
+              <a:chExt cx="3306402" cy="3568295"/>
+            </a:xfrm>
+          </p:grpSpPr>
+          <p:pic>
+            <p:nvPicPr>
+              <p:cNvPr id="15" name="Picture 14">
+                <a:extLst>
+                  <a:ext uri="{FF2B5EF4-FFF2-40B4-BE49-F238E27FC236}">
+                    <a16:creationId xmlns:a16="http://schemas.microsoft.com/office/drawing/2014/main" id="{B9CB2A8A-C39E-29E0-141C-B6870B71B6CA}"/>
+                  </a:ext>
+                </a:extLst>
+              </p:cNvPr>
+              <p:cNvPicPr>
+                <a:picLocks noChangeAspect="1"/>
+              </p:cNvPicPr>
+              <p:nvPr/>
+            </p:nvPicPr>
+            <p:blipFill>
+              <a:blip r:embed="rId3"/>
+              <a:srcRect l="23787" r="23357"/>
+              <a:stretch>
+                <a:fillRect/>
+              </a:stretch>
+            </p:blipFill>
+            <p:spPr>
+              <a:xfrm>
+                <a:off x="4832848" y="233955"/>
+                <a:ext cx="3306401" cy="3568295"/>
+              </a:xfrm>
+              <a:prstGeom prst="rect">
+                <a:avLst/>
+              </a:prstGeom>
+              <a:ln>
+                <a:solidFill>
+                  <a:schemeClr val="tx1"/>
+                </a:solidFill>
+              </a:ln>
+            </p:spPr>
+          </p:pic>
+          <p:pic>
+            <p:nvPicPr>
+              <p:cNvPr id="16" name="Picture 15">
+                <a:extLst>
+                  <a:ext uri="{FF2B5EF4-FFF2-40B4-BE49-F238E27FC236}">
+                    <a16:creationId xmlns:a16="http://schemas.microsoft.com/office/drawing/2014/main" id="{1A9F365A-1B25-E2C7-0638-8F708C714F5C}"/>
+                  </a:ext>
+                </a:extLst>
+              </p:cNvPr>
+              <p:cNvPicPr>
+                <a:picLocks noChangeAspect="1"/>
+              </p:cNvPicPr>
+              <p:nvPr/>
+            </p:nvPicPr>
+            <p:blipFill>
+              <a:blip r:embed="rId5">
+                <a:extLst>
+                  <a:ext uri="{28A0092B-C50C-407E-A947-70E740481C1C}">
+                    <a14:useLocalDpi xmlns:a14="http://schemas.microsoft.com/office/drawing/2010/main" val="0"/>
+                  </a:ext>
+                </a:extLst>
+              </a:blip>
+              <a:srcRect l="36443" t="35319" r="36508" b="19888"/>
+              <a:stretch>
+                <a:fillRect/>
+              </a:stretch>
+            </p:blipFill>
+            <p:spPr>
+              <a:xfrm>
+                <a:off x="4832849" y="785283"/>
+                <a:ext cx="3306401" cy="2722033"/>
+              </a:xfrm>
+              <a:prstGeom prst="rect">
+                <a:avLst/>
+              </a:prstGeom>
+              <a:ln>
+                <a:noFill/>
+              </a:ln>
+            </p:spPr>
+          </p:pic>
+          <p:pic>
+            <p:nvPicPr>
+              <p:cNvPr id="17" name="Picture 16">
+                <a:extLst>
+                  <a:ext uri="{FF2B5EF4-FFF2-40B4-BE49-F238E27FC236}">
+                    <a16:creationId xmlns:a16="http://schemas.microsoft.com/office/drawing/2014/main" id="{3E53C1B7-0E4B-B83B-A54A-49224F95F4EE}"/>
+                  </a:ext>
+                </a:extLst>
+              </p:cNvPr>
+              <p:cNvPicPr>
+                <a:picLocks noChangeAspect="1"/>
+              </p:cNvPicPr>
+              <p:nvPr/>
+            </p:nvPicPr>
+            <p:blipFill>
+              <a:blip r:embed="rId5">
+                <a:extLst>
+                  <a:ext uri="{28A0092B-C50C-407E-A947-70E740481C1C}">
+                    <a14:useLocalDpi xmlns:a14="http://schemas.microsoft.com/office/drawing/2010/main" val="0"/>
+                  </a:ext>
+                </a:extLst>
+              </a:blip>
+              <a:srcRect l="36443" t="79258" r="36508"/>
+              <a:stretch>
+                <a:fillRect/>
+              </a:stretch>
+            </p:blipFill>
+            <p:spPr>
+              <a:xfrm>
+                <a:off x="4832849" y="2541772"/>
+                <a:ext cx="3306401" cy="1260477"/>
+              </a:xfrm>
+              <a:prstGeom prst="rect">
+                <a:avLst/>
+              </a:prstGeom>
+              <a:ln>
+                <a:noFill/>
+              </a:ln>
+            </p:spPr>
+          </p:pic>
+        </p:grpSp>
+        <p:pic>
+          <p:nvPicPr>
+            <p:cNvPr id="11" name="Picture 10">
+              <a:extLst>
+                <a:ext uri="{FF2B5EF4-FFF2-40B4-BE49-F238E27FC236}">
+                  <a16:creationId xmlns:a16="http://schemas.microsoft.com/office/drawing/2014/main" id="{9B729050-9A13-ADEB-BC8E-735212534407}"/>
+                </a:ext>
+              </a:extLst>
+            </p:cNvPr>
+            <p:cNvPicPr>
+              <a:picLocks noChangeAspect="1"/>
+            </p:cNvPicPr>
+            <p:nvPr/>
+          </p:nvPicPr>
+          <p:blipFill>
+            <a:blip r:embed="rId6"/>
+            <a:srcRect l="23775" r="23343"/>
+            <a:stretch>
+              <a:fillRect/>
+            </a:stretch>
+          </p:blipFill>
+          <p:spPr>
+            <a:xfrm>
+              <a:off x="5169330" y="5388477"/>
+              <a:ext cx="3306400" cy="3568294"/>
+            </a:xfrm>
+            <a:prstGeom prst="rect">
+              <a:avLst/>
+            </a:prstGeom>
+            <a:ln>
+              <a:solidFill>
+                <a:schemeClr val="tx1"/>
+              </a:solidFill>
+            </a:ln>
+          </p:spPr>
+        </p:pic>
+      </p:grpSp>
       <p:pic>
         <p:nvPicPr>
-          <p:cNvPr id="5" name="Picture 4">
-            <a:extLst>
-              <a:ext uri="{FF2B5EF4-FFF2-40B4-BE49-F238E27FC236}">
-                <a16:creationId xmlns:a16="http://schemas.microsoft.com/office/drawing/2014/main" id="{D79399CB-5D9D-B494-1B8D-714318D91D6B}"/>
+          <p:cNvPr id="13" name="Picture 12">
+            <a:extLst>
+              <a:ext uri="{FF2B5EF4-FFF2-40B4-BE49-F238E27FC236}">
+                <a16:creationId xmlns:a16="http://schemas.microsoft.com/office/drawing/2014/main" id="{74A421F6-39A1-458A-5900-979D3827C4CA}"/>
               </a:ext>
             </a:extLst>
           </p:cNvPr>
@@ -4615,34 +5182,173 @@
           <p:nvPr/>
         </p:nvPicPr>
         <p:blipFill>
-          <a:blip r:embed="rId3">
-            <a:extLst>
-              <a:ext uri="{28A0092B-C50C-407E-A947-70E740481C1C}">
-                <a14:useLocalDpi xmlns:a14="http://schemas.microsoft.com/office/drawing/2010/main" val="0"/>
-              </a:ext>
-            </a:extLst>
-          </a:blip>
-          <a:srcRect l="35368" r="35955"/>
+          <a:blip r:embed="rId3"/>
+          <a:srcRect l="23787" r="23357"/>
           <a:stretch>
             <a:fillRect/>
           </a:stretch>
         </p:blipFill>
         <p:spPr>
           <a:xfrm>
-            <a:off x="430303" y="368180"/>
-            <a:ext cx="3496235" cy="6076890"/>
+            <a:off x="5088575" y="4022833"/>
+            <a:ext cx="2520729" cy="2720391"/>
           </a:xfrm>
           <a:prstGeom prst="rect">
             <a:avLst/>
           </a:prstGeom>
+          <a:ln>
+            <a:solidFill>
+              <a:schemeClr val="tx1"/>
+            </a:solidFill>
+          </a:ln>
         </p:spPr>
       </p:pic>
+      <p:sp>
+        <p:nvSpPr>
+          <p:cNvPr id="23" name="Arrow: Right 22">
+            <a:extLst>
+              <a:ext uri="{FF2B5EF4-FFF2-40B4-BE49-F238E27FC236}">
+                <a16:creationId xmlns:a16="http://schemas.microsoft.com/office/drawing/2014/main" id="{958B5E7A-271B-F31F-725F-0A52A59AACB9}"/>
+              </a:ext>
+            </a:extLst>
+          </p:cNvPr>
+          <p:cNvSpPr/>
+          <p:nvPr/>
+        </p:nvSpPr>
+        <p:spPr>
+          <a:xfrm>
+            <a:off x="7680268" y="5024221"/>
+            <a:ext cx="495300" cy="457946"/>
+          </a:xfrm>
+          <a:prstGeom prst="rightArrow">
+            <a:avLst/>
+          </a:prstGeom>
+          <a:solidFill>
+            <a:srgbClr val="546A8F"/>
+          </a:solidFill>
+          <a:ln>
+            <a:noFill/>
+          </a:ln>
+        </p:spPr>
+        <p:style>
+          <a:lnRef idx="2">
+            <a:schemeClr val="accent1">
+              <a:shade val="15000"/>
+            </a:schemeClr>
+          </a:lnRef>
+          <a:fillRef idx="1">
+            <a:schemeClr val="accent1"/>
+          </a:fillRef>
+          <a:effectRef idx="0">
+            <a:schemeClr val="accent1"/>
+          </a:effectRef>
+          <a:fontRef idx="minor">
+            <a:schemeClr val="lt1"/>
+          </a:fontRef>
+        </p:style>
+        <p:txBody>
+          <a:bodyPr rtlCol="0" anchor="ctr"/>
+          <a:lstStyle/>
+          <a:p>
+            <a:pPr algn="ctr"/>
+            <a:endParaRPr lang="en-US"/>
+          </a:p>
+        </p:txBody>
+      </p:sp>
+    </p:spTree>
+    <p:extLst>
+      <p:ext uri="{BB962C8B-B14F-4D97-AF65-F5344CB8AC3E}">
+        <p14:creationId xmlns:p14="http://schemas.microsoft.com/office/powerpoint/2010/main" val="469835844"/>
+      </p:ext>
+    </p:extLst>
+  </p:cSld>
+  <p:clrMapOvr>
+    <a:masterClrMapping/>
+  </p:clrMapOvr>
+</p:sld>
+</file>
+
+<file path=ppt/slides/slide6.xml><?xml version="1.0" encoding="utf-8"?>
+<p:sld xmlns:a="http://schemas.openxmlformats.org/drawingml/2006/main" xmlns:r="http://schemas.openxmlformats.org/officeDocument/2006/relationships" xmlns:p="http://schemas.openxmlformats.org/presentationml/2006/main">
+  <p:cSld>
+    <p:spTree>
+      <p:nvGrpSpPr>
+        <p:cNvPr id="1" name="">
+          <a:extLst>
+            <a:ext uri="{FF2B5EF4-FFF2-40B4-BE49-F238E27FC236}">
+              <a16:creationId xmlns:a16="http://schemas.microsoft.com/office/drawing/2014/main" id="{AFDB5038-7E48-EA3E-1FE2-033E971F3C74}"/>
+            </a:ext>
+          </a:extLst>
+        </p:cNvPr>
+        <p:cNvGrpSpPr/>
+        <p:nvPr/>
+      </p:nvGrpSpPr>
+      <p:grpSpPr>
+        <a:xfrm>
+          <a:off x="0" y="0"/>
+          <a:ext cx="0" cy="0"/>
+          <a:chOff x="0" y="0"/>
+          <a:chExt cx="0" cy="0"/>
+        </a:xfrm>
+      </p:grpSpPr>
+      <p:sp>
+        <p:nvSpPr>
+          <p:cNvPr id="2" name="Rectangle 1">
+            <a:extLst>
+              <a:ext uri="{FF2B5EF4-FFF2-40B4-BE49-F238E27FC236}">
+                <a16:creationId xmlns:a16="http://schemas.microsoft.com/office/drawing/2014/main" id="{5157C50F-44D6-B915-3831-14A19BD84C13}"/>
+              </a:ext>
+            </a:extLst>
+          </p:cNvPr>
+          <p:cNvSpPr/>
+          <p:nvPr/>
+        </p:nvSpPr>
+        <p:spPr>
+          <a:xfrm>
+            <a:off x="0" y="0"/>
+            <a:ext cx="12192000" cy="6858000"/>
+          </a:xfrm>
+          <a:prstGeom prst="rect">
+            <a:avLst/>
+          </a:prstGeom>
+          <a:solidFill>
+            <a:srgbClr val="FEF5E5"/>
+          </a:solidFill>
+          <a:ln>
+            <a:noFill/>
+          </a:ln>
+        </p:spPr>
+        <p:style>
+          <a:lnRef idx="2">
+            <a:schemeClr val="accent1">
+              <a:shade val="15000"/>
+            </a:schemeClr>
+          </a:lnRef>
+          <a:fillRef idx="1">
+            <a:schemeClr val="accent1"/>
+          </a:fillRef>
+          <a:effectRef idx="0">
+            <a:schemeClr val="accent1"/>
+          </a:effectRef>
+          <a:fontRef idx="minor">
+            <a:schemeClr val="lt1"/>
+          </a:fontRef>
+        </p:style>
+        <p:txBody>
+          <a:bodyPr rtlCol="0" anchor="ctr"/>
+          <a:lstStyle/>
+          <a:p>
+            <a:pPr algn="ctr"/>
+            <a:endParaRPr lang="en-US"/>
+          </a:p>
+        </p:txBody>
+      </p:sp>
       <p:pic>
         <p:nvPicPr>
-          <p:cNvPr id="7" name="Picture 6">
-            <a:extLst>
-              <a:ext uri="{FF2B5EF4-FFF2-40B4-BE49-F238E27FC236}">
-                <a16:creationId xmlns:a16="http://schemas.microsoft.com/office/drawing/2014/main" id="{71A16536-9070-67A1-3391-DF59A96F9D1F}"/>
+          <p:cNvPr id="3" name="Picture 2">
+            <a:extLst>
+              <a:ext uri="{FF2B5EF4-FFF2-40B4-BE49-F238E27FC236}">
+                <a16:creationId xmlns:a16="http://schemas.microsoft.com/office/drawing/2014/main" id="{D3048D09-7317-482D-8F82-73C219981B36}"/>
               </a:ext>
             </a:extLst>
           </p:cNvPr>
@@ -4652,32 +5358,851 @@
           <p:nvPr/>
         </p:nvPicPr>
         <p:blipFill>
-          <a:blip r:embed="rId4">
-            <a:extLst>
-              <a:ext uri="{28A0092B-C50C-407E-A947-70E740481C1C}">
-                <a14:useLocalDpi xmlns:a14="http://schemas.microsoft.com/office/drawing/2010/main" val="0"/>
-              </a:ext>
-            </a:extLst>
-          </a:blip>
-          <a:srcRect l="35551" r="35772"/>
+          <a:blip r:embed="rId2"/>
+          <a:srcRect l="35897" r="35846"/>
           <a:stretch>
             <a:fillRect/>
           </a:stretch>
         </p:blipFill>
         <p:spPr>
           <a:xfrm>
-            <a:off x="4123759" y="368180"/>
-            <a:ext cx="3496236" cy="6061020"/>
+            <a:off x="8246533" y="94419"/>
+            <a:ext cx="3741867" cy="6648805"/>
           </a:xfrm>
           <a:prstGeom prst="rect">
             <a:avLst/>
           </a:prstGeom>
+          <a:ln>
+            <a:solidFill>
+              <a:schemeClr val="tx1"/>
+            </a:solidFill>
+          </a:ln>
+        </p:spPr>
+      </p:pic>
+      <p:grpSp>
+        <p:nvGrpSpPr>
+          <p:cNvPr id="18" name="Group 17">
+            <a:extLst>
+              <a:ext uri="{FF2B5EF4-FFF2-40B4-BE49-F238E27FC236}">
+                <a16:creationId xmlns:a16="http://schemas.microsoft.com/office/drawing/2014/main" id="{8FD17716-2B26-EDE5-E659-2A31391C9D1D}"/>
+              </a:ext>
+            </a:extLst>
+          </p:cNvPr>
+          <p:cNvGrpSpPr/>
+          <p:nvPr/>
+        </p:nvGrpSpPr>
+        <p:grpSpPr>
+          <a:xfrm>
+            <a:off x="94190" y="93132"/>
+            <a:ext cx="3723659" cy="4018601"/>
+            <a:chOff x="658780" y="233953"/>
+            <a:chExt cx="3306403" cy="3568295"/>
+          </a:xfrm>
+        </p:grpSpPr>
+        <p:pic>
+          <p:nvPicPr>
+            <p:cNvPr id="19" name="Picture 18">
+              <a:extLst>
+                <a:ext uri="{FF2B5EF4-FFF2-40B4-BE49-F238E27FC236}">
+                  <a16:creationId xmlns:a16="http://schemas.microsoft.com/office/drawing/2014/main" id="{B1831839-035F-5B65-E80B-EE09076A0CDF}"/>
+                </a:ext>
+              </a:extLst>
+            </p:cNvPr>
+            <p:cNvPicPr>
+              <a:picLocks noChangeAspect="1"/>
+            </p:cNvPicPr>
+            <p:nvPr/>
+          </p:nvPicPr>
+          <p:blipFill>
+            <a:blip r:embed="rId3"/>
+            <a:srcRect l="23787" r="23357"/>
+            <a:stretch>
+              <a:fillRect/>
+            </a:stretch>
+          </p:blipFill>
+          <p:spPr>
+            <a:xfrm>
+              <a:off x="658782" y="233953"/>
+              <a:ext cx="3306401" cy="3568295"/>
+            </a:xfrm>
+            <a:prstGeom prst="rect">
+              <a:avLst/>
+            </a:prstGeom>
+            <a:ln>
+              <a:solidFill>
+                <a:schemeClr val="tx1"/>
+              </a:solidFill>
+            </a:ln>
+          </p:spPr>
+        </p:pic>
+        <p:pic>
+          <p:nvPicPr>
+            <p:cNvPr id="20" name="Picture 19">
+              <a:extLst>
+                <a:ext uri="{FF2B5EF4-FFF2-40B4-BE49-F238E27FC236}">
+                  <a16:creationId xmlns:a16="http://schemas.microsoft.com/office/drawing/2014/main" id="{544A7C55-FA77-8F1F-63F9-0C83AFA83E5B}"/>
+                </a:ext>
+              </a:extLst>
+            </p:cNvPr>
+            <p:cNvPicPr>
+              <a:picLocks noChangeAspect="1"/>
+            </p:cNvPicPr>
+            <p:nvPr/>
+          </p:nvPicPr>
+          <p:blipFill>
+            <a:blip r:embed="rId4">
+              <a:extLst>
+                <a:ext uri="{28A0092B-C50C-407E-A947-70E740481C1C}">
+                  <a14:useLocalDpi xmlns:a14="http://schemas.microsoft.com/office/drawing/2010/main" val="0"/>
+                </a:ext>
+              </a:extLst>
+            </a:blip>
+            <a:srcRect l="36353" t="35319" r="36599" b="41971"/>
+            <a:stretch>
+              <a:fillRect/>
+            </a:stretch>
+          </p:blipFill>
+          <p:spPr>
+            <a:xfrm>
+              <a:off x="658781" y="785283"/>
+              <a:ext cx="3297767" cy="1380067"/>
+            </a:xfrm>
+            <a:prstGeom prst="rect">
+              <a:avLst/>
+            </a:prstGeom>
+            <a:ln>
+              <a:noFill/>
+            </a:ln>
+          </p:spPr>
+        </p:pic>
+        <p:pic>
+          <p:nvPicPr>
+            <p:cNvPr id="21" name="Picture 20">
+              <a:extLst>
+                <a:ext uri="{FF2B5EF4-FFF2-40B4-BE49-F238E27FC236}">
+                  <a16:creationId xmlns:a16="http://schemas.microsoft.com/office/drawing/2014/main" id="{346AF47F-8EC0-B26F-12C9-F7410A243F03}"/>
+                </a:ext>
+              </a:extLst>
+            </p:cNvPr>
+            <p:cNvPicPr>
+              <a:picLocks noChangeAspect="1"/>
+            </p:cNvPicPr>
+            <p:nvPr/>
+          </p:nvPicPr>
+          <p:blipFill>
+            <a:blip r:embed="rId4">
+              <a:extLst>
+                <a:ext uri="{28A0092B-C50C-407E-A947-70E740481C1C}">
+                  <a14:useLocalDpi xmlns:a14="http://schemas.microsoft.com/office/drawing/2010/main" val="0"/>
+                </a:ext>
+              </a:extLst>
+            </a:blip>
+            <a:srcRect l="36353" t="79258" r="36599"/>
+            <a:stretch>
+              <a:fillRect/>
+            </a:stretch>
+          </p:blipFill>
+          <p:spPr>
+            <a:xfrm>
+              <a:off x="658780" y="2541771"/>
+              <a:ext cx="3297767" cy="1260477"/>
+            </a:xfrm>
+            <a:prstGeom prst="rect">
+              <a:avLst/>
+            </a:prstGeom>
+            <a:ln>
+              <a:noFill/>
+            </a:ln>
+          </p:spPr>
+        </p:pic>
+      </p:grpSp>
+      <p:grpSp>
+        <p:nvGrpSpPr>
+          <p:cNvPr id="25" name="Group 24">
+            <a:extLst>
+              <a:ext uri="{FF2B5EF4-FFF2-40B4-BE49-F238E27FC236}">
+                <a16:creationId xmlns:a16="http://schemas.microsoft.com/office/drawing/2014/main" id="{8E1D4337-957D-3636-8D5C-C670F63CEBC0}"/>
+              </a:ext>
+            </a:extLst>
+          </p:cNvPr>
+          <p:cNvGrpSpPr/>
+          <p:nvPr/>
+        </p:nvGrpSpPr>
+        <p:grpSpPr>
+          <a:xfrm>
+            <a:off x="950794" y="1259297"/>
+            <a:ext cx="3723657" cy="4018601"/>
+            <a:chOff x="950794" y="1259297"/>
+            <a:chExt cx="3723657" cy="4018601"/>
+          </a:xfrm>
+        </p:grpSpPr>
+        <p:pic>
+          <p:nvPicPr>
+            <p:cNvPr id="15" name="Picture 14">
+              <a:extLst>
+                <a:ext uri="{FF2B5EF4-FFF2-40B4-BE49-F238E27FC236}">
+                  <a16:creationId xmlns:a16="http://schemas.microsoft.com/office/drawing/2014/main" id="{E8553005-E934-AD9C-C50F-27EB65CF6F92}"/>
+                </a:ext>
+              </a:extLst>
+            </p:cNvPr>
+            <p:cNvPicPr>
+              <a:picLocks noChangeAspect="1"/>
+            </p:cNvPicPr>
+            <p:nvPr/>
+          </p:nvPicPr>
+          <p:blipFill>
+            <a:blip r:embed="rId3"/>
+            <a:srcRect l="23787" r="23357"/>
+            <a:stretch>
+              <a:fillRect/>
+            </a:stretch>
+          </p:blipFill>
+          <p:spPr>
+            <a:xfrm>
+              <a:off x="950794" y="1259297"/>
+              <a:ext cx="3723656" cy="4018601"/>
+            </a:xfrm>
+            <a:prstGeom prst="rect">
+              <a:avLst/>
+            </a:prstGeom>
+            <a:ln>
+              <a:solidFill>
+                <a:schemeClr val="tx1"/>
+              </a:solidFill>
+            </a:ln>
+          </p:spPr>
+        </p:pic>
+        <p:pic>
+          <p:nvPicPr>
+            <p:cNvPr id="16" name="Picture 15">
+              <a:extLst>
+                <a:ext uri="{FF2B5EF4-FFF2-40B4-BE49-F238E27FC236}">
+                  <a16:creationId xmlns:a16="http://schemas.microsoft.com/office/drawing/2014/main" id="{B1E7FBAA-B393-A469-46B8-FF7A8985D276}"/>
+                </a:ext>
+              </a:extLst>
+            </p:cNvPr>
+            <p:cNvPicPr>
+              <a:picLocks noChangeAspect="1"/>
+            </p:cNvPicPr>
+            <p:nvPr/>
+          </p:nvPicPr>
+          <p:blipFill>
+            <a:blip r:embed="rId5">
+              <a:extLst>
+                <a:ext uri="{28A0092B-C50C-407E-A947-70E740481C1C}">
+                  <a14:useLocalDpi xmlns:a14="http://schemas.microsoft.com/office/drawing/2010/main" val="0"/>
+                </a:ext>
+              </a:extLst>
+            </a:blip>
+            <a:srcRect l="36443" t="35319" r="36508" b="19888"/>
+            <a:stretch>
+              <a:fillRect/>
+            </a:stretch>
+          </p:blipFill>
+          <p:spPr>
+            <a:xfrm>
+              <a:off x="950795" y="1880201"/>
+              <a:ext cx="3723656" cy="3065544"/>
+            </a:xfrm>
+            <a:prstGeom prst="rect">
+              <a:avLst/>
+            </a:prstGeom>
+            <a:ln>
+              <a:noFill/>
+            </a:ln>
+          </p:spPr>
+        </p:pic>
+        <p:pic>
+          <p:nvPicPr>
+            <p:cNvPr id="17" name="Picture 16">
+              <a:extLst>
+                <a:ext uri="{FF2B5EF4-FFF2-40B4-BE49-F238E27FC236}">
+                  <a16:creationId xmlns:a16="http://schemas.microsoft.com/office/drawing/2014/main" id="{BC7EA9B2-ABCB-31E6-E2D2-B233A790C2EA}"/>
+                </a:ext>
+              </a:extLst>
+            </p:cNvPr>
+            <p:cNvPicPr>
+              <a:picLocks noChangeAspect="1"/>
+            </p:cNvPicPr>
+            <p:nvPr/>
+          </p:nvPicPr>
+          <p:blipFill>
+            <a:blip r:embed="rId5">
+              <a:extLst>
+                <a:ext uri="{28A0092B-C50C-407E-A947-70E740481C1C}">
+                  <a14:useLocalDpi xmlns:a14="http://schemas.microsoft.com/office/drawing/2010/main" val="0"/>
+                </a:ext>
+              </a:extLst>
+            </a:blip>
+            <a:srcRect l="36443" t="79258" r="36508"/>
+            <a:stretch>
+              <a:fillRect/>
+            </a:stretch>
+          </p:blipFill>
+          <p:spPr>
+            <a:xfrm>
+              <a:off x="950795" y="3858352"/>
+              <a:ext cx="3723656" cy="1419545"/>
+            </a:xfrm>
+            <a:prstGeom prst="rect">
+              <a:avLst/>
+            </a:prstGeom>
+            <a:ln>
+              <a:noFill/>
+            </a:ln>
+          </p:spPr>
+        </p:pic>
+      </p:grpSp>
+      <p:pic>
+        <p:nvPicPr>
+          <p:cNvPr id="11" name="Picture 10">
+            <a:extLst>
+              <a:ext uri="{FF2B5EF4-FFF2-40B4-BE49-F238E27FC236}">
+                <a16:creationId xmlns:a16="http://schemas.microsoft.com/office/drawing/2014/main" id="{7B713273-D433-F907-9482-01506E368827}"/>
+              </a:ext>
+            </a:extLst>
+          </p:cNvPr>
+          <p:cNvPicPr>
+            <a:picLocks noChangeAspect="1"/>
+          </p:cNvPicPr>
+          <p:nvPr/>
+        </p:nvPicPr>
+        <p:blipFill>
+          <a:blip r:embed="rId6"/>
+          <a:srcRect l="23775" r="23343"/>
+          <a:stretch>
+            <a:fillRect/>
+          </a:stretch>
+        </p:blipFill>
+        <p:spPr>
+          <a:xfrm>
+            <a:off x="2085434" y="2723337"/>
+            <a:ext cx="3723655" cy="4018599"/>
+          </a:xfrm>
+          <a:prstGeom prst="rect">
+            <a:avLst/>
+          </a:prstGeom>
+          <a:ln>
+            <a:solidFill>
+              <a:schemeClr val="tx1"/>
+            </a:solidFill>
+          </a:ln>
+        </p:spPr>
+      </p:pic>
+      <p:sp>
+        <p:nvSpPr>
+          <p:cNvPr id="23" name="Arrow: Right 22">
+            <a:extLst>
+              <a:ext uri="{FF2B5EF4-FFF2-40B4-BE49-F238E27FC236}">
+                <a16:creationId xmlns:a16="http://schemas.microsoft.com/office/drawing/2014/main" id="{16E104EC-8ACB-0DC1-57C3-9EDD8AD0E2F2}"/>
+              </a:ext>
+            </a:extLst>
+          </p:cNvPr>
+          <p:cNvSpPr/>
+          <p:nvPr/>
+        </p:nvSpPr>
+        <p:spPr>
+          <a:xfrm>
+            <a:off x="7504133" y="4252183"/>
+            <a:ext cx="569382" cy="457946"/>
+          </a:xfrm>
+          <a:prstGeom prst="rightArrow">
+            <a:avLst/>
+          </a:prstGeom>
+          <a:solidFill>
+            <a:srgbClr val="546A8F"/>
+          </a:solidFill>
+          <a:ln>
+            <a:noFill/>
+          </a:ln>
+        </p:spPr>
+        <p:style>
+          <a:lnRef idx="2">
+            <a:schemeClr val="accent1">
+              <a:shade val="15000"/>
+            </a:schemeClr>
+          </a:lnRef>
+          <a:fillRef idx="1">
+            <a:schemeClr val="accent1"/>
+          </a:fillRef>
+          <a:effectRef idx="0">
+            <a:schemeClr val="accent1"/>
+          </a:effectRef>
+          <a:fontRef idx="minor">
+            <a:schemeClr val="lt1"/>
+          </a:fontRef>
+        </p:style>
+        <p:txBody>
+          <a:bodyPr rtlCol="0" anchor="ctr"/>
+          <a:lstStyle/>
+          <a:p>
+            <a:pPr algn="ctr"/>
+            <a:endParaRPr lang="en-US"/>
+          </a:p>
+        </p:txBody>
+      </p:sp>
+      <p:pic>
+        <p:nvPicPr>
+          <p:cNvPr id="12" name="Picture 11">
+            <a:extLst>
+              <a:ext uri="{FF2B5EF4-FFF2-40B4-BE49-F238E27FC236}">
+                <a16:creationId xmlns:a16="http://schemas.microsoft.com/office/drawing/2014/main" id="{A910B9E8-BED3-05A6-2AAA-561D2BB22CB4}"/>
+              </a:ext>
+            </a:extLst>
+          </p:cNvPr>
+          <p:cNvPicPr>
+            <a:picLocks noChangeAspect="1"/>
+          </p:cNvPicPr>
+          <p:nvPr/>
+        </p:nvPicPr>
+        <p:blipFill>
+          <a:blip r:embed="rId5">
+            <a:extLst>
+              <a:ext uri="{28A0092B-C50C-407E-A947-70E740481C1C}">
+                <a14:useLocalDpi xmlns:a14="http://schemas.microsoft.com/office/drawing/2010/main" val="0"/>
+              </a:ext>
+            </a:extLst>
+          </a:blip>
+          <a:srcRect l="36443" t="79258" r="36508"/>
+          <a:stretch>
+            <a:fillRect/>
+          </a:stretch>
+        </p:blipFill>
+        <p:spPr>
+          <a:xfrm>
+            <a:off x="2085434" y="5322391"/>
+            <a:ext cx="3723656" cy="1419545"/>
+          </a:xfrm>
+          <a:prstGeom prst="rect">
+            <a:avLst/>
+          </a:prstGeom>
+          <a:ln>
+            <a:noFill/>
+          </a:ln>
+        </p:spPr>
+      </p:pic>
+      <p:sp>
+        <p:nvSpPr>
+          <p:cNvPr id="24" name="TextBox 23">
+            <a:extLst>
+              <a:ext uri="{FF2B5EF4-FFF2-40B4-BE49-F238E27FC236}">
+                <a16:creationId xmlns:a16="http://schemas.microsoft.com/office/drawing/2014/main" id="{C3CF20BB-73E0-3779-06B6-63DEE8A55F62}"/>
+              </a:ext>
+            </a:extLst>
+          </p:cNvPr>
+          <p:cNvSpPr txBox="1"/>
+          <p:nvPr/>
+        </p:nvSpPr>
+        <p:spPr>
+          <a:xfrm>
+            <a:off x="2249817" y="5739631"/>
+            <a:ext cx="3314489" cy="457200"/>
+          </a:xfrm>
+          <a:prstGeom prst="rect">
+            <a:avLst/>
+          </a:prstGeom>
+          <a:solidFill>
+            <a:srgbClr val="FEF5E5"/>
+          </a:solidFill>
+        </p:spPr>
+        <p:txBody>
+          <a:bodyPr wrap="square" rtlCol="0">
+            <a:spAutoFit/>
+          </a:bodyPr>
+          <a:lstStyle/>
+          <a:p>
+            <a:r>
+              <a:rPr lang="en-US" sz="900" dirty="0">
+                <a:solidFill>
+                  <a:srgbClr val="462D00"/>
+                </a:solidFill>
+                <a:latin typeface="Georgia" panose="02040502050405020303" pitchFamily="18" charset="0"/>
+              </a:rPr>
+              <a:t>Yep!</a:t>
+            </a:r>
+          </a:p>
+        </p:txBody>
+      </p:sp>
+      <p:pic>
+        <p:nvPicPr>
+          <p:cNvPr id="13" name="Picture 12">
+            <a:extLst>
+              <a:ext uri="{FF2B5EF4-FFF2-40B4-BE49-F238E27FC236}">
+                <a16:creationId xmlns:a16="http://schemas.microsoft.com/office/drawing/2014/main" id="{09C543F0-B75F-84DD-4B3C-55922D6AE88E}"/>
+              </a:ext>
+            </a:extLst>
+          </p:cNvPr>
+          <p:cNvPicPr>
+            <a:picLocks noChangeAspect="1"/>
+          </p:cNvPicPr>
+          <p:nvPr/>
+        </p:nvPicPr>
+        <p:blipFill>
+          <a:blip r:embed="rId3"/>
+          <a:srcRect l="23787" r="23357"/>
+          <a:stretch>
+            <a:fillRect/>
+          </a:stretch>
+        </p:blipFill>
+        <p:spPr>
+          <a:xfrm>
+            <a:off x="3607460" y="2723338"/>
+            <a:ext cx="3723655" cy="4018598"/>
+          </a:xfrm>
+          <a:prstGeom prst="rect">
+            <a:avLst/>
+          </a:prstGeom>
+          <a:ln>
+            <a:solidFill>
+              <a:schemeClr val="tx1"/>
+            </a:solidFill>
+          </a:ln>
         </p:spPr>
       </p:pic>
     </p:spTree>
     <p:extLst>
       <p:ext uri="{BB962C8B-B14F-4D97-AF65-F5344CB8AC3E}">
-        <p14:creationId xmlns:p14="http://schemas.microsoft.com/office/powerpoint/2010/main" val="469835844"/>
+        <p14:creationId xmlns:p14="http://schemas.microsoft.com/office/powerpoint/2010/main" val="4047762002"/>
+      </p:ext>
+    </p:extLst>
+  </p:cSld>
+  <p:clrMapOvr>
+    <a:masterClrMapping/>
+  </p:clrMapOvr>
+</p:sld>
+</file>
+
+<file path=ppt/slides/slide7.xml><?xml version="1.0" encoding="utf-8"?>
+<p:sld xmlns:a="http://schemas.openxmlformats.org/drawingml/2006/main" xmlns:r="http://schemas.openxmlformats.org/officeDocument/2006/relationships" xmlns:p="http://schemas.openxmlformats.org/presentationml/2006/main">
+  <p:cSld>
+    <p:spTree>
+      <p:nvGrpSpPr>
+        <p:cNvPr id="1" name=""/>
+        <p:cNvGrpSpPr/>
+        <p:nvPr/>
+      </p:nvGrpSpPr>
+      <p:grpSpPr>
+        <a:xfrm>
+          <a:off x="0" y="0"/>
+          <a:ext cx="0" cy="0"/>
+          <a:chOff x="0" y="0"/>
+          <a:chExt cx="0" cy="0"/>
+        </a:xfrm>
+      </p:grpSpPr>
+      <p:pic>
+        <p:nvPicPr>
+          <p:cNvPr id="2" name="Picture 1">
+            <a:extLst>
+              <a:ext uri="{FF2B5EF4-FFF2-40B4-BE49-F238E27FC236}">
+                <a16:creationId xmlns:a16="http://schemas.microsoft.com/office/drawing/2014/main" id="{510CED87-83A2-242B-42C1-CA1E42E247BC}"/>
+              </a:ext>
+            </a:extLst>
+          </p:cNvPr>
+          <p:cNvPicPr>
+            <a:picLocks noChangeAspect="1"/>
+          </p:cNvPicPr>
+          <p:nvPr/>
+        </p:nvPicPr>
+        <p:blipFill>
+          <a:blip r:embed="rId2"/>
+          <a:srcRect l="23787" r="23357"/>
+          <a:stretch>
+            <a:fillRect/>
+          </a:stretch>
+        </p:blipFill>
+        <p:spPr>
+          <a:xfrm>
+            <a:off x="8916256" y="233955"/>
+            <a:ext cx="3306401" cy="3568295"/>
+          </a:xfrm>
+          <a:prstGeom prst="rect">
+            <a:avLst/>
+          </a:prstGeom>
+          <a:ln>
+            <a:solidFill>
+              <a:schemeClr val="tx1"/>
+            </a:solidFill>
+          </a:ln>
+        </p:spPr>
+      </p:pic>
+      <p:grpSp>
+        <p:nvGrpSpPr>
+          <p:cNvPr id="12" name="Group 11">
+            <a:extLst>
+              <a:ext uri="{FF2B5EF4-FFF2-40B4-BE49-F238E27FC236}">
+                <a16:creationId xmlns:a16="http://schemas.microsoft.com/office/drawing/2014/main" id="{4F2A28D3-F0C1-08D2-2557-FDFE5F856E83}"/>
+              </a:ext>
+            </a:extLst>
+          </p:cNvPr>
+          <p:cNvGrpSpPr/>
+          <p:nvPr/>
+        </p:nvGrpSpPr>
+        <p:grpSpPr>
+          <a:xfrm>
+            <a:off x="4832848" y="233955"/>
+            <a:ext cx="3306402" cy="3568295"/>
+            <a:chOff x="4832848" y="233955"/>
+            <a:chExt cx="3306402" cy="3568295"/>
+          </a:xfrm>
+        </p:grpSpPr>
+        <p:pic>
+          <p:nvPicPr>
+            <p:cNvPr id="9" name="Picture 8">
+              <a:extLst>
+                <a:ext uri="{FF2B5EF4-FFF2-40B4-BE49-F238E27FC236}">
+                  <a16:creationId xmlns:a16="http://schemas.microsoft.com/office/drawing/2014/main" id="{ACE30195-B732-7741-B581-358A14EF466F}"/>
+                </a:ext>
+              </a:extLst>
+            </p:cNvPr>
+            <p:cNvPicPr>
+              <a:picLocks noChangeAspect="1"/>
+            </p:cNvPicPr>
+            <p:nvPr/>
+          </p:nvPicPr>
+          <p:blipFill>
+            <a:blip r:embed="rId2"/>
+            <a:srcRect l="23787" r="23357"/>
+            <a:stretch>
+              <a:fillRect/>
+            </a:stretch>
+          </p:blipFill>
+          <p:spPr>
+            <a:xfrm>
+              <a:off x="4832848" y="233955"/>
+              <a:ext cx="3306401" cy="3568295"/>
+            </a:xfrm>
+            <a:prstGeom prst="rect">
+              <a:avLst/>
+            </a:prstGeom>
+            <a:ln>
+              <a:solidFill>
+                <a:schemeClr val="tx1"/>
+              </a:solidFill>
+            </a:ln>
+          </p:spPr>
+        </p:pic>
+        <p:pic>
+          <p:nvPicPr>
+            <p:cNvPr id="7" name="Picture 6">
+              <a:extLst>
+                <a:ext uri="{FF2B5EF4-FFF2-40B4-BE49-F238E27FC236}">
+                  <a16:creationId xmlns:a16="http://schemas.microsoft.com/office/drawing/2014/main" id="{71A16536-9070-67A1-3391-DF59A96F9D1F}"/>
+                </a:ext>
+              </a:extLst>
+            </p:cNvPr>
+            <p:cNvPicPr>
+              <a:picLocks noChangeAspect="1"/>
+            </p:cNvPicPr>
+            <p:nvPr/>
+          </p:nvPicPr>
+          <p:blipFill>
+            <a:blip r:embed="rId3">
+              <a:extLst>
+                <a:ext uri="{28A0092B-C50C-407E-A947-70E740481C1C}">
+                  <a14:useLocalDpi xmlns:a14="http://schemas.microsoft.com/office/drawing/2010/main" val="0"/>
+                </a:ext>
+              </a:extLst>
+            </a:blip>
+            <a:srcRect l="36443" t="35319" r="36508" b="19888"/>
+            <a:stretch>
+              <a:fillRect/>
+            </a:stretch>
+          </p:blipFill>
+          <p:spPr>
+            <a:xfrm>
+              <a:off x="4832849" y="785283"/>
+              <a:ext cx="3306401" cy="2722033"/>
+            </a:xfrm>
+            <a:prstGeom prst="rect">
+              <a:avLst/>
+            </a:prstGeom>
+            <a:ln>
+              <a:noFill/>
+            </a:ln>
+          </p:spPr>
+        </p:pic>
+        <p:pic>
+          <p:nvPicPr>
+            <p:cNvPr id="6" name="Picture 5">
+              <a:extLst>
+                <a:ext uri="{FF2B5EF4-FFF2-40B4-BE49-F238E27FC236}">
+                  <a16:creationId xmlns:a16="http://schemas.microsoft.com/office/drawing/2014/main" id="{28FF6686-2F6B-E825-82EB-ACC5C27A89E9}"/>
+                </a:ext>
+              </a:extLst>
+            </p:cNvPr>
+            <p:cNvPicPr>
+              <a:picLocks noChangeAspect="1"/>
+            </p:cNvPicPr>
+            <p:nvPr/>
+          </p:nvPicPr>
+          <p:blipFill>
+            <a:blip r:embed="rId3">
+              <a:extLst>
+                <a:ext uri="{28A0092B-C50C-407E-A947-70E740481C1C}">
+                  <a14:useLocalDpi xmlns:a14="http://schemas.microsoft.com/office/drawing/2010/main" val="0"/>
+                </a:ext>
+              </a:extLst>
+            </a:blip>
+            <a:srcRect l="36443" t="79258" r="36508"/>
+            <a:stretch>
+              <a:fillRect/>
+            </a:stretch>
+          </p:blipFill>
+          <p:spPr>
+            <a:xfrm>
+              <a:off x="4832849" y="2541772"/>
+              <a:ext cx="3306401" cy="1260477"/>
+            </a:xfrm>
+            <a:prstGeom prst="rect">
+              <a:avLst/>
+            </a:prstGeom>
+            <a:ln>
+              <a:noFill/>
+            </a:ln>
+          </p:spPr>
+        </p:pic>
+      </p:grpSp>
+      <p:grpSp>
+        <p:nvGrpSpPr>
+          <p:cNvPr id="11" name="Group 10">
+            <a:extLst>
+              <a:ext uri="{FF2B5EF4-FFF2-40B4-BE49-F238E27FC236}">
+                <a16:creationId xmlns:a16="http://schemas.microsoft.com/office/drawing/2014/main" id="{8EB42081-C029-EF0C-602D-237FD48C561A}"/>
+              </a:ext>
+            </a:extLst>
+          </p:cNvPr>
+          <p:cNvGrpSpPr/>
+          <p:nvPr/>
+        </p:nvGrpSpPr>
+        <p:grpSpPr>
+          <a:xfrm>
+            <a:off x="658780" y="233953"/>
+            <a:ext cx="3306403" cy="3568295"/>
+            <a:chOff x="658780" y="233953"/>
+            <a:chExt cx="3306403" cy="3568295"/>
+          </a:xfrm>
+        </p:grpSpPr>
+        <p:pic>
+          <p:nvPicPr>
+            <p:cNvPr id="10" name="Picture 9">
+              <a:extLst>
+                <a:ext uri="{FF2B5EF4-FFF2-40B4-BE49-F238E27FC236}">
+                  <a16:creationId xmlns:a16="http://schemas.microsoft.com/office/drawing/2014/main" id="{2982EB7E-1E85-2781-6E25-3E0E3419C798}"/>
+                </a:ext>
+              </a:extLst>
+            </p:cNvPr>
+            <p:cNvPicPr>
+              <a:picLocks noChangeAspect="1"/>
+            </p:cNvPicPr>
+            <p:nvPr/>
+          </p:nvPicPr>
+          <p:blipFill>
+            <a:blip r:embed="rId2"/>
+            <a:srcRect l="23787" r="23357"/>
+            <a:stretch>
+              <a:fillRect/>
+            </a:stretch>
+          </p:blipFill>
+          <p:spPr>
+            <a:xfrm>
+              <a:off x="658782" y="233953"/>
+              <a:ext cx="3306401" cy="3568295"/>
+            </a:xfrm>
+            <a:prstGeom prst="rect">
+              <a:avLst/>
+            </a:prstGeom>
+            <a:ln>
+              <a:solidFill>
+                <a:schemeClr val="tx1"/>
+              </a:solidFill>
+            </a:ln>
+          </p:spPr>
+        </p:pic>
+        <p:pic>
+          <p:nvPicPr>
+            <p:cNvPr id="5" name="Picture 4">
+              <a:extLst>
+                <a:ext uri="{FF2B5EF4-FFF2-40B4-BE49-F238E27FC236}">
+                  <a16:creationId xmlns:a16="http://schemas.microsoft.com/office/drawing/2014/main" id="{D79399CB-5D9D-B494-1B8D-714318D91D6B}"/>
+                </a:ext>
+              </a:extLst>
+            </p:cNvPr>
+            <p:cNvPicPr>
+              <a:picLocks noChangeAspect="1"/>
+            </p:cNvPicPr>
+            <p:nvPr/>
+          </p:nvPicPr>
+          <p:blipFill>
+            <a:blip r:embed="rId4">
+              <a:extLst>
+                <a:ext uri="{28A0092B-C50C-407E-A947-70E740481C1C}">
+                  <a14:useLocalDpi xmlns:a14="http://schemas.microsoft.com/office/drawing/2010/main" val="0"/>
+                </a:ext>
+              </a:extLst>
+            </a:blip>
+            <a:srcRect l="36353" t="35319" r="36599" b="41971"/>
+            <a:stretch>
+              <a:fillRect/>
+            </a:stretch>
+          </p:blipFill>
+          <p:spPr>
+            <a:xfrm>
+              <a:off x="658781" y="785283"/>
+              <a:ext cx="3297767" cy="1380067"/>
+            </a:xfrm>
+            <a:prstGeom prst="rect">
+              <a:avLst/>
+            </a:prstGeom>
+            <a:ln>
+              <a:noFill/>
+            </a:ln>
+          </p:spPr>
+        </p:pic>
+        <p:pic>
+          <p:nvPicPr>
+            <p:cNvPr id="8" name="Picture 7">
+              <a:extLst>
+                <a:ext uri="{FF2B5EF4-FFF2-40B4-BE49-F238E27FC236}">
+                  <a16:creationId xmlns:a16="http://schemas.microsoft.com/office/drawing/2014/main" id="{1A015273-A4F2-6121-F415-AA0B3993696B}"/>
+                </a:ext>
+              </a:extLst>
+            </p:cNvPr>
+            <p:cNvPicPr>
+              <a:picLocks noChangeAspect="1"/>
+            </p:cNvPicPr>
+            <p:nvPr/>
+          </p:nvPicPr>
+          <p:blipFill>
+            <a:blip r:embed="rId4">
+              <a:extLst>
+                <a:ext uri="{28A0092B-C50C-407E-A947-70E740481C1C}">
+                  <a14:useLocalDpi xmlns:a14="http://schemas.microsoft.com/office/drawing/2010/main" val="0"/>
+                </a:ext>
+              </a:extLst>
+            </a:blip>
+            <a:srcRect l="36353" t="79258" r="36599"/>
+            <a:stretch>
+              <a:fillRect/>
+            </a:stretch>
+          </p:blipFill>
+          <p:spPr>
+            <a:xfrm>
+              <a:off x="658780" y="2541771"/>
+              <a:ext cx="3297767" cy="1260477"/>
+            </a:xfrm>
+            <a:prstGeom prst="rect">
+              <a:avLst/>
+            </a:prstGeom>
+            <a:ln>
+              <a:noFill/>
+            </a:ln>
+          </p:spPr>
+        </p:pic>
+      </p:grpSp>
+    </p:spTree>
+    <p:extLst>
+      <p:ext uri="{BB962C8B-B14F-4D97-AF65-F5344CB8AC3E}">
+        <p14:creationId xmlns:p14="http://schemas.microsoft.com/office/powerpoint/2010/main" val="2950246068"/>
       </p:ext>
     </p:extLst>
   </p:cSld>
